--- a/docs/BAO-CAO-slide-bao-ve.pptx
+++ b/docs/BAO-CAO-slide-bao-ve.pptx
@@ -152,7 +152,16 @@
             </a:pPr>
             <a:r>
               <a:rPr lang="vi-VN" sz="1400" b="0" dirty="0"/>
-              <a:t>Tái lập 1 lệnh · 214 test · 98.176 phép kiểm tra, 0 phát hiện</a:t>
+              <a:t>Tái lập 1 lệnh · 220 test · 98.192 phép kiểm tra, 0 phát hiện</a:t>
+            </a:r>
+          </a:p>
+          <a:p>
+            <a:pPr marL="228600" indent="-228600">
+              <a:buChar char="•"/>
+            </a:pPr>
+            <a:r>
+              <a:rPr lang="vi-VN" sz="1400" b="0" dirty="0"/>
+              <a:t>Dữ liệu SEC thật: 20 file hash khớp, 4.609 fact tra ngược, 0 bịa</a:t>
             </a:r>
           </a:p>
           <a:p>
@@ -277,7 +286,16 @@
             </a:pPr>
             <a:r>
               <a:rPr lang="vi-VN" sz="1400" b="0" dirty="0"/>
-              <a:t>214 test tự động · audit 98.176 phép kiểm tra, 0 phát hiện</a:t>
+              <a:t>Kiểm chứng dữ liệu thật: python -m scripts.verify_provenance (0 lệch)</a:t>
+            </a:r>
+          </a:p>
+          <a:p>
+            <a:pPr marL="228600" indent="-228600">
+              <a:buChar char="•"/>
+            </a:pPr>
+            <a:r>
+              <a:rPr lang="vi-VN" sz="1400" b="0" dirty="0"/>
+              <a:t>220 test tự động · audit 98.192 phép kiểm tra, 0 phát hiện</a:t>
             </a:r>
           </a:p>
         </p:txBody>

--- a/docs/BAO-CAO-slide-bao-ve.pptx
+++ b/docs/BAO-CAO-slide-bao-ve.pptx
@@ -152,7 +152,7 @@
             </a:pPr>
             <a:r>
               <a:rPr lang="vi-VN" sz="1400" b="0" dirty="0"/>
-              <a:t>Tái lập 1 lệnh · 220 test · 98.192 phép kiểm tra, 0 phát hiện</a:t>
+              <a:t>Tái lập 1 lệnh · 220 test · 98.200 phép kiểm tra, 0 phát hiện</a:t>
             </a:r>
           </a:p>
           <a:p>
@@ -295,7 +295,7 @@
             </a:pPr>
             <a:r>
               <a:rPr lang="vi-VN" sz="1400" b="0" dirty="0"/>
-              <a:t>220 test tự động · audit 98.192 phép kiểm tra, 0 phát hiện</a:t>
+              <a:t>220 test tự động · audit 98.200 phép kiểm tra, 0 phát hiện</a:t>
             </a:r>
           </a:p>
         </p:txBody>
@@ -638,7 +638,7 @@
             </a:pPr>
             <a:r>
               <a:rPr lang="vi-VN" sz="1400" b="0" dirty="0"/>
-              <a:t>Nhãn dương 62,3% ở cấp mẫu (IR = 1,66)</a:t>
+              <a:t>Nhãn dương 62,3% ở cấp mẫu (IR toàn corpus = 1,66; train = 1,65)</a:t>
             </a:r>
           </a:p>
           <a:p>
@@ -1057,6 +1057,15 @@
             </a:pPr>
             <a:r>
               <a:rPr lang="vi-VN" sz="1400" b="0" dirty="0"/>
+              <a:t>Mô hình triển khai giữ cấu hình MẶC ĐỊNH (tinh chỉnh chỉ +0,003 CV-AP ⇒ nhiễu)</a:t>
+            </a:r>
+          </a:p>
+          <a:p>
+            <a:pPr marL="228600" indent="-228600">
+              <a:buChar char="•"/>
+            </a:pPr>
+            <a:r>
+              <a:rPr lang="vi-VN" sz="1400" b="0" dirty="0"/>
               <a:t>Chọn theo AP cross-company, không theo F1 in-domain</a:t>
             </a:r>
           </a:p>
@@ -1066,7 +1075,7 @@
             </a:pPr>
             <a:r>
               <a:rPr lang="vi-VN" sz="1400" b="0" dirty="0"/>
-              <a:t>Random search + sổ thực nghiệm runs.csv (98 dòng)</a:t>
+              <a:t>Random search + sổ thực nghiệm runs.csv (153 dòng)</a:t>
             </a:r>
           </a:p>
           <a:p>
@@ -1351,7 +1360,16 @@
             </a:pPr>
             <a:r>
               <a:rPr lang="vi-VN" sz="1400" b="0" dirty="0"/>
-              <a:t>Chi phí kỳ vọng giảm 8,0 → 6,0 tại ngưỡng 0,783</a:t>
+              <a:t>@0,783 (tính trên test để phân tích): TN 25 · FP 1 · FN 1 · TP 37</a:t>
+            </a:r>
+          </a:p>
+          <a:p>
+            <a:pPr marL="228600" indent="-228600">
+              <a:buChar char="•"/>
+            </a:pPr>
+            <a:r>
+              <a:rPr lang="vi-VN" sz="1400" b="0" dirty="0"/>
+              <a:t>Chi phí kỳ vọng giảm 8,0 → 6,0; ngưỡng vận hành = 0,788 (chọn trên validation)</a:t>
             </a:r>
           </a:p>
           <a:p>

--- a/docs/BAO-CAO-slide-bao-ve.pptx
+++ b/docs/BAO-CAO-slide-bao-ve.pptx
@@ -152,7 +152,7 @@
             </a:pPr>
             <a:r>
               <a:rPr lang="vi-VN" sz="1400" b="0" dirty="0"/>
-              <a:t>Tái lập 1 lệnh · 220 test · 98.200 phép kiểm tra, 0 phát hiện</a:t>
+              <a:t>Tái lập 1 lệnh · 222 test · 98.200 phép kiểm tra, 0 phát hiện</a:t>
             </a:r>
           </a:p>
           <a:p>
@@ -295,7 +295,7 @@
             </a:pPr>
             <a:r>
               <a:rPr lang="vi-VN" sz="1400" b="0" dirty="0"/>
-              <a:t>220 test tự động · audit 98.200 phép kiểm tra, 0 phát hiện</a:t>
+              <a:t>222 test tự động · audit 98.200 phép kiểm tra, 0 phát hiện</a:t>
             </a:r>
           </a:p>
         </p:txBody>
@@ -1007,7 +1007,7 @@
             </a:pPr>
             <a:r>
               <a:rPr lang="vi-VN" sz="2400" b="1" dirty="0"/>
-              <a:t>Bốn họ mô hình và cách chọn</a:t>
+              <a:t>Ba họ mô hình và cách chọn</a:t>
             </a:r>
           </a:p>
         </p:txBody>
@@ -1039,7 +1039,7 @@
             </a:pPr>
             <a:r>
               <a:rPr lang="vi-VN" sz="1400" b="0" dirty="0"/>
-              <a:t>Logistic · Random Forest · HistGradientBoosting · LightGBM</a:t>
+              <a:t>Logistic Regression · Random Forest · HistGradientBoosting (3 họ, thuần scikit-learn)</a:t>
             </a:r>
           </a:p>
           <a:p>
@@ -1075,16 +1075,16 @@
             </a:pPr>
             <a:r>
               <a:rPr lang="vi-VN" sz="1400" b="0" dirty="0"/>
-              <a:t>Random search + sổ thực nghiệm runs.csv (153 dòng)</a:t>
-            </a:r>
-          </a:p>
-          <a:p>
-            <a:pPr marL="228600" indent="-228600">
-              <a:buChar char="•"/>
-            </a:pPr>
-            <a:r>
-              <a:rPr lang="vi-VN" sz="1400" b="0" dirty="0"/>
-              <a:t>XGBoost bị chặn phiên bản, đã ghi cách sửa</a:t>
+              <a:t>Random search + sổ thực nghiệm runs.csv (113 dòng)</a:t>
+            </a:r>
+          </a:p>
+          <a:p>
+            <a:pPr marL="228600" indent="-228600">
+              <a:buChar char="•"/>
+            </a:pPr>
+            <a:r>
+              <a:rPr lang="vi-VN" sz="1400" b="0" dirty="0"/>
+              <a:t>Chỉ 3 họ mô hình (không xgboost/lightgbm) ⇒ mọi báo cáo/slide lấy từ 1 registry</a:t>
             </a:r>
           </a:p>
         </p:txBody>

--- a/docs/BAO-CAO-slide-bao-ve.pptx
+++ b/docs/BAO-CAO-slide-bao-ve.pptx
@@ -152,7 +152,7 @@
             </a:pPr>
             <a:r>
               <a:rPr lang="vi-VN" sz="1400" b="0" dirty="0"/>
-              <a:t>Tái lập 1 lệnh · 222 test · 98.200 phép kiểm tra, 0 phát hiện</a:t>
+              <a:t>Tái lập 1 lệnh · 234 test · 98.200+ phép kiểm tra, 0 phát hiện</a:t>
             </a:r>
           </a:p>
           <a:p>
@@ -295,7 +295,7 @@
             </a:pPr>
             <a:r>
               <a:rPr lang="vi-VN" sz="1400" b="0" dirty="0"/>
-              <a:t>222 test tự động · audit 98.200 phép kiểm tra, 0 phát hiện</a:t>
+              <a:t>234 test tự động · audit 98.200+ phép kiểm tra, 0 phát hiện</a:t>
             </a:r>
           </a:p>
         </p:txBody>
@@ -1007,7 +1007,7 @@
             </a:pPr>
             <a:r>
               <a:rPr lang="vi-VN" sz="2400" b="1" dirty="0"/>
-              <a:t>Ba họ mô hình và cách chọn</a:t>
+              <a:t>Bốn họ mô hình và cách chọn</a:t>
             </a:r>
           </a:p>
         </p:txBody>
@@ -1039,7 +1039,25 @@
             </a:pPr>
             <a:r>
               <a:rPr lang="vi-VN" sz="1400" b="0" dirty="0"/>
-              <a:t>Logistic Regression · Random Forest · HistGradientBoosting (3 họ, thuần scikit-learn)</a:t>
+              <a:t>Logistic Regression · Random Forest · HistGradientBoosting · MLP (4 họ, thuần scikit-learn)</a:t>
+            </a:r>
+          </a:p>
+          <a:p>
+            <a:pPr marL="228600" indent="-228600">
+              <a:buChar char="•"/>
+            </a:pPr>
+            <a:r>
+              <a:rPr lang="vi-VN" sz="1400" b="0" dirty="0"/>
+              <a:t>Baseline quy tắc Altman Z'' &lt; 1,1 (không học tham số) + ticker-prior + dummy + 1 chỉ tiêu</a:t>
+            </a:r>
+          </a:p>
+          <a:p>
+            <a:pPr marL="228600" indent="-228600">
+              <a:buChar char="•"/>
+            </a:pPr>
+            <a:r>
+              <a:rPr lang="vi-VN" sz="1400" b="0" dirty="0"/>
+              <a:t>Kiểm chứng 3 góc: in-domain · cross-company (GroupKFold/LOCO) · walk-forward theo thời gian</a:t>
             </a:r>
           </a:p>
           <a:p>
@@ -1075,16 +1093,16 @@
             </a:pPr>
             <a:r>
               <a:rPr lang="vi-VN" sz="1400" b="0" dirty="0"/>
-              <a:t>Random search + sổ thực nghiệm runs.csv (113 dòng)</a:t>
-            </a:r>
-          </a:p>
-          <a:p>
-            <a:pPr marL="228600" indent="-228600">
-              <a:buChar char="•"/>
-            </a:pPr>
-            <a:r>
-              <a:rPr lang="vi-VN" sz="1400" b="0" dirty="0"/>
-              <a:t>Chỉ 3 họ mô hình (không xgboost/lightgbm) ⇒ mọi báo cáo/slide lấy từ 1 registry</a:t>
+              <a:t>Random search + sổ thực nghiệm runs.csv (153 dòng, 4 họ mô hình)</a:t>
+            </a:r>
+          </a:p>
+          <a:p>
+            <a:pPr marL="228600" indent="-228600">
+              <a:buChar char="•"/>
+            </a:pPr>
+            <a:r>
+              <a:rPr lang="vi-VN" sz="1400" b="0" dirty="0"/>
+              <a:t>Chỉ 4 họ mô hình (không xgboost/lightgbm) ⇒ mọi báo cáo/slide lấy từ 1 registry</a:t>
             </a:r>
           </a:p>
         </p:txBody>
